--- a/DBTUNING/ch30_Advisor프레임워크_자동튜닝/ch30_Advisor프레임워크와자동튜닝.pptx
+++ b/DBTUNING/ch30_Advisor프레임워크_자동튜닝/ch30_Advisor프레임워크와자동튜닝.pptx
@@ -5366,7 +5366,7 @@
                 </a:solidFill>
                 <a:latin typeface="맑은 고딕"/>
               </a:rPr>
-              <a:t>제15장</a:t>
+              <a:t>제ch30</a:t>
             </a:r>
           </a:p>
         </p:txBody>
@@ -12186,7 +12186,7 @@
                 </a:solidFill>
                 <a:latin typeface="Consolas"/>
               </a:rPr>
-              <a:t>근본 해결 = 상관관계 컬럼에 컬럼 그룹 확장 통계(7장)</a:t>
+              <a:t>근본 해결 = 상관관계 컬럼에 컬럼 그룹 확장 통계(ch21)</a:t>
             </a:r>
           </a:p>
         </p:txBody>

--- a/DBTUNING/ch30_Advisor프레임워크_자동튜닝/ch30_Advisor프레임워크와자동튜닝.pptx
+++ b/DBTUNING/ch30_Advisor프레임워크_자동튜닝/ch30_Advisor프레임워크와자동튜닝.pptx
@@ -5366,7 +5366,7 @@
                 </a:solidFill>
                 <a:latin typeface="맑은 고딕"/>
               </a:rPr>
-              <a:t>제ch30</a:t>
+              <a:t>ch30</a:t>
             </a:r>
           </a:p>
         </p:txBody>

--- a/DBTUNING/ch30_Advisor프레임워크_자동튜닝/ch30_Advisor프레임워크와자동튜닝.pptx
+++ b/DBTUNING/ch30_Advisor프레임워크_자동튜닝/ch30_Advisor프레임워크와자동튜닝.pptx
@@ -6062,7 +6062,7 @@
                 </a:solidFill>
                 <a:latin typeface="맑은 고딕"/>
               </a:rPr>
-              <a:t>15.3</a:t>
+              <a:t>30.3</a:t>
             </a:r>
           </a:p>
         </p:txBody>
@@ -7122,7 +7122,7 @@
                 </a:solidFill>
                 <a:latin typeface="맑은 고딕"/>
               </a:rPr>
-              <a:t>15.4</a:t>
+              <a:t>30.4</a:t>
             </a:r>
           </a:p>
         </p:txBody>
@@ -9481,7 +9481,7 @@
                 </a:solidFill>
                 <a:latin typeface="맑은 고딕"/>
               </a:rPr>
-              <a:t>15.5</a:t>
+              <a:t>30.5</a:t>
             </a:r>
           </a:p>
         </p:txBody>
@@ -10296,7 +10296,7 @@
                 </a:solidFill>
                 <a:latin typeface="맑은 고딕"/>
               </a:rPr>
-              <a:t>15.6</a:t>
+              <a:t>30.6</a:t>
             </a:r>
           </a:p>
         </p:txBody>
@@ -11150,7 +11150,7 @@
                 </a:solidFill>
                 <a:latin typeface="맑은 고딕"/>
               </a:rPr>
-              <a:t>•  15.2  자동 유지관리 작업과 유지관리 윈도우</a:t>
+              <a:t>•  30.2  자동 유지관리 작업과 유지관리 윈도우</a:t>
             </a:r>
           </a:p>
           <a:p>
@@ -11166,7 +11166,7 @@
                 </a:solidFill>
                 <a:latin typeface="맑은 고딕"/>
               </a:rPr>
-              <a:t>•  15.3  Advisory Framework 전반</a:t>
+              <a:t>•  30.3  Advisory Framework 전반</a:t>
             </a:r>
           </a:p>
           <a:p>
@@ -11182,7 +11182,7 @@
                 </a:solidFill>
                 <a:latin typeface="맑은 고딕"/>
               </a:rPr>
-              <a:t>•  15.4  SQL Tuning Advisor — 두 실측 사례의 대조</a:t>
+              <a:t>•  30.4  SQL Tuning Advisor — 두 실측 사례의 대조</a:t>
             </a:r>
           </a:p>
           <a:p>
@@ -11198,7 +11198,7 @@
                 </a:solidFill>
                 <a:latin typeface="맑은 고딕"/>
               </a:rPr>
-              <a:t>•  15.5  SQL Access Advisor</a:t>
+              <a:t>•  30.5  SQL Access Advisor</a:t>
             </a:r>
           </a:p>
           <a:p>
@@ -11214,7 +11214,7 @@
                 </a:solidFill>
                 <a:latin typeface="맑은 고딕"/>
               </a:rPr>
-              <a:t>•  15.6  SQL Performance Analyzer (SPA)</a:t>
+              <a:t>•  30.6  SQL Performance Analyzer (SPA)</a:t>
             </a:r>
           </a:p>
           <a:p>
@@ -11230,7 +11230,7 @@
                 </a:solidFill>
                 <a:latin typeface="맑은 고딕"/>
               </a:rPr>
-              <a:t>•  15.7  SQL Plan Directives와 Adaptive Plans</a:t>
+              <a:t>•  30.7  SQL Plan Directives와 Adaptive Plans</a:t>
             </a:r>
           </a:p>
           <a:p>
@@ -11347,7 +11347,7 @@
                 </a:solidFill>
                 <a:latin typeface="맑은 고딕"/>
               </a:rPr>
-              <a:t>15.7</a:t>
+              <a:t>30.7</a:t>
             </a:r>
           </a:p>
         </p:txBody>
@@ -13465,7 +13465,7 @@
                 </a:solidFill>
                 <a:latin typeface="맑은 고딕"/>
               </a:rPr>
-              <a:t>15.2</a:t>
+              <a:t>30.2</a:t>
             </a:r>
           </a:p>
         </p:txBody>
